--- a/docs/assets/slides/OutbackRobots_Lesson6_Slides_AIandEthics.pptx
+++ b/docs/assets/slides/OutbackRobots_Lesson6_Slides_AIandEthics.pptx
@@ -5,7 +5,7 @@
     <p:sldMasterId id="2147483648" r:id="rId1"/>
   </p:sldMasterIdLst>
   <p:notesMasterIdLst>
-    <p:notesMasterId r:id="rId26"/>
+    <p:notesMasterId r:id="rId27"/>
   </p:notesMasterIdLst>
   <p:sldIdLst>
     <p:sldId id="370" r:id="rId2"/>
@@ -29,21 +29,22 @@
     <p:sldId id="381" r:id="rId20"/>
     <p:sldId id="382" r:id="rId21"/>
     <p:sldId id="383" r:id="rId22"/>
-    <p:sldId id="371" r:id="rId23"/>
-    <p:sldId id="384" r:id="rId24"/>
-    <p:sldId id="355" r:id="rId25"/>
+    <p:sldId id="394" r:id="rId23"/>
+    <p:sldId id="392" r:id="rId24"/>
+    <p:sldId id="384" r:id="rId25"/>
+    <p:sldId id="355" r:id="rId26"/>
   </p:sldIdLst>
   <p:sldSz cx="9906000" cy="6858000" type="A4"/>
   <p:notesSz cx="7099300" cy="10234613"/>
   <p:embeddedFontLst>
     <p:embeddedFont>
       <p:font typeface="Berlin Sans FB" panose="020E0602020502020306" pitchFamily="34" charset="0"/>
-      <p:regular r:id="rId27"/>
-      <p:bold r:id="rId28"/>
+      <p:regular r:id="rId28"/>
+      <p:bold r:id="rId29"/>
     </p:embeddedFont>
     <p:embeddedFont>
       <p:font typeface="Berlin Sans FB Demi" panose="020E0802020502020306" pitchFamily="34" charset="0"/>
-      <p:bold r:id="rId29"/>
+      <p:bold r:id="rId30"/>
     </p:embeddedFont>
   </p:embeddedFontLst>
   <p:defaultTextStyle>
@@ -175,7 +176,8 @@
             <p14:sldId id="381"/>
             <p14:sldId id="382"/>
             <p14:sldId id="383"/>
-            <p14:sldId id="371"/>
+            <p14:sldId id="394"/>
+            <p14:sldId id="392"/>
             <p14:sldId id="384"/>
             <p14:sldId id="355"/>
           </p14:sldIdLst>
@@ -210,9 +212,75 @@
 <file path=ppt/revisionInfo.xml><?xml version="1.0" encoding="utf-8"?>
 <p1510:revInfo xmlns:a="http://schemas.openxmlformats.org/drawingml/2006/main" xmlns:r="http://schemas.openxmlformats.org/officeDocument/2006/relationships" xmlns:p1510="http://schemas.microsoft.com/office/powerpoint/2015/10/main">
   <p1510:revLst>
-    <p1510:client id="{108C03DC-029A-46F6-A62C-886FCD57A69F}" v="5" dt="2026-03-10T01:01:03.651"/>
+    <p1510:client id="{94FCBB5C-B16A-4CF7-BC1F-B9886B351D81}" v="2" dt="2026-06-15T02:24:22.733"/>
   </p1510:revLst>
 </p1510:revInfo>
+</file>
+
+<file path=ppt/changesInfos/changesInfo1.xml><?xml version="1.0" encoding="utf-8"?>
+<pc:chgInfo xmlns:a="http://schemas.openxmlformats.org/drawingml/2006/main" xmlns:r="http://schemas.openxmlformats.org/officeDocument/2006/relationships" xmlns:ac="http://schemas.microsoft.com/office/drawing/2013/main/command" xmlns:pc="http://schemas.microsoft.com/office/powerpoint/2013/main/command">
+  <pc:docChgLst>
+    <pc:chgData name="Ben Kelly" userId="79179b44-934c-4bdd-82f6-75b69b2eecee" providerId="ADAL" clId="{A042A029-C61D-4345-AC60-70288B726536}"/>
+    <pc:docChg chg="custSel addSld delSld modSld sldOrd modSection">
+      <pc:chgData name="Ben Kelly" userId="79179b44-934c-4bdd-82f6-75b69b2eecee" providerId="ADAL" clId="{A042A029-C61D-4345-AC60-70288B726536}" dt="2026-06-15T02:26:26.162" v="302" actId="20577"/>
+      <pc:docMkLst>
+        <pc:docMk/>
+      </pc:docMkLst>
+      <pc:sldChg chg="modSp mod">
+        <pc:chgData name="Ben Kelly" userId="79179b44-934c-4bdd-82f6-75b69b2eecee" providerId="ADAL" clId="{A042A029-C61D-4345-AC60-70288B726536}" dt="2026-06-15T02:22:57.458" v="0" actId="13926"/>
+        <pc:sldMkLst>
+          <pc:docMk/>
+          <pc:sldMk cId="3485535442" sldId="352"/>
+        </pc:sldMkLst>
+        <pc:spChg chg="mod">
+          <ac:chgData name="Ben Kelly" userId="79179b44-934c-4bdd-82f6-75b69b2eecee" providerId="ADAL" clId="{A042A029-C61D-4345-AC60-70288B726536}" dt="2026-06-15T02:22:57.458" v="0" actId="13926"/>
+          <ac:spMkLst>
+            <pc:docMk/>
+            <pc:sldMk cId="3485535442" sldId="352"/>
+            <ac:spMk id="3" creationId="{78DA9DE1-2FA6-A86C-4579-45D1C4F7E961}"/>
+          </ac:spMkLst>
+        </pc:spChg>
+      </pc:sldChg>
+      <pc:sldChg chg="del">
+        <pc:chgData name="Ben Kelly" userId="79179b44-934c-4bdd-82f6-75b69b2eecee" providerId="ADAL" clId="{A042A029-C61D-4345-AC60-70288B726536}" dt="2026-06-15T02:23:38.282" v="2" actId="47"/>
+        <pc:sldMkLst>
+          <pc:docMk/>
+          <pc:sldMk cId="923499938" sldId="371"/>
+        </pc:sldMkLst>
+      </pc:sldChg>
+      <pc:sldChg chg="add">
+        <pc:chgData name="Ben Kelly" userId="79179b44-934c-4bdd-82f6-75b69b2eecee" providerId="ADAL" clId="{A042A029-C61D-4345-AC60-70288B726536}" dt="2026-06-15T02:23:35.959" v="1"/>
+        <pc:sldMkLst>
+          <pc:docMk/>
+          <pc:sldMk cId="3211396220" sldId="392"/>
+        </pc:sldMkLst>
+      </pc:sldChg>
+      <pc:sldChg chg="modSp add mod ord">
+        <pc:chgData name="Ben Kelly" userId="79179b44-934c-4bdd-82f6-75b69b2eecee" providerId="ADAL" clId="{A042A029-C61D-4345-AC60-70288B726536}" dt="2026-06-15T02:26:26.162" v="302" actId="20577"/>
+        <pc:sldMkLst>
+          <pc:docMk/>
+          <pc:sldMk cId="1527236185" sldId="394"/>
+        </pc:sldMkLst>
+        <pc:spChg chg="mod">
+          <ac:chgData name="Ben Kelly" userId="79179b44-934c-4bdd-82f6-75b69b2eecee" providerId="ADAL" clId="{A042A029-C61D-4345-AC60-70288B726536}" dt="2026-06-15T02:24:32.578" v="27" actId="20577"/>
+          <ac:spMkLst>
+            <pc:docMk/>
+            <pc:sldMk cId="1527236185" sldId="394"/>
+            <ac:spMk id="3" creationId="{26FBF710-CF7F-7F50-8D0A-4854AADBCDF6}"/>
+          </ac:spMkLst>
+        </pc:spChg>
+        <pc:spChg chg="mod">
+          <ac:chgData name="Ben Kelly" userId="79179b44-934c-4bdd-82f6-75b69b2eecee" providerId="ADAL" clId="{A042A029-C61D-4345-AC60-70288B726536}" dt="2026-06-15T02:26:26.162" v="302" actId="20577"/>
+          <ac:spMkLst>
+            <pc:docMk/>
+            <pc:sldMk cId="1527236185" sldId="394"/>
+            <ac:spMk id="4" creationId="{62ABC290-95D3-3450-B7D9-FE60FF4BF806}"/>
+          </ac:spMkLst>
+        </pc:spChg>
+      </pc:sldChg>
+    </pc:docChg>
+  </pc:docChgLst>
+</pc:chgInfo>
 </file>
 
 <file path=ppt/notesMasters/notesMaster1.xml><?xml version="1.0" encoding="utf-8"?>
@@ -297,7 +365,7 @@
           <a:p>
             <a:fld id="{4F3F5AEF-4F6C-41E2-869B-89F90C9BC9CB}" type="datetimeFigureOut">
               <a:rPr lang="en-US" smtClean="0"/>
-              <a:t>3/13/2026</a:t>
+              <a:t>6/15/2026</a:t>
             </a:fld>
             <a:endParaRPr lang="en-US"/>
           </a:p>
@@ -743,7 +811,7 @@
           <a:p>
             <a:fld id="{0C641F1D-C242-463A-9118-CEC8A32732E1}" type="datetime1">
               <a:rPr lang="en-US" smtClean="0"/>
-              <a:t>3/13/2026</a:t>
+              <a:t>6/15/2026</a:t>
             </a:fld>
             <a:endParaRPr lang="en-US"/>
           </a:p>
@@ -1866,7 +1934,7 @@
           <a:p>
             <a:fld id="{6C3E4B74-615C-44D1-8875-0F95FDB4ACF1}" type="datetime1">
               <a:rPr lang="en-US" smtClean="0"/>
-              <a:t>3/13/2026</a:t>
+              <a:t>6/15/2026</a:t>
             </a:fld>
             <a:endParaRPr lang="en-US"/>
           </a:p>
@@ -2114,7 +2182,7 @@
           <a:p>
             <a:fld id="{ED101441-3954-4234-8E77-79F8676957CB}" type="datetime1">
               <a:rPr lang="en-US" smtClean="0"/>
-              <a:t>3/13/2026</a:t>
+              <a:t>6/15/2026</a:t>
             </a:fld>
             <a:endParaRPr lang="en-US"/>
           </a:p>
@@ -2278,7 +2346,7 @@
           <a:p>
             <a:fld id="{FE5290FD-71D0-407D-83AB-396A7FD0C9D0}" type="datetime1">
               <a:rPr lang="en-US" smtClean="0"/>
-              <a:t>3/13/2026</a:t>
+              <a:t>6/15/2026</a:t>
             </a:fld>
             <a:endParaRPr lang="en-US"/>
           </a:p>
@@ -2452,7 +2520,7 @@
           <a:p>
             <a:fld id="{C1019B73-AB8A-401C-A09D-1C931BCE90B8}" type="datetime1">
               <a:rPr lang="en-US" smtClean="0"/>
-              <a:t>3/13/2026</a:t>
+              <a:t>6/15/2026</a:t>
             </a:fld>
             <a:endParaRPr lang="en-US"/>
           </a:p>
@@ -2616,7 +2684,7 @@
           <a:p>
             <a:fld id="{D1C8F71B-FE01-41BB-BA09-F81DE1617D4D}" type="datetime1">
               <a:rPr lang="en-US" smtClean="0"/>
-              <a:t>3/13/2026</a:t>
+              <a:t>6/15/2026</a:t>
             </a:fld>
             <a:endParaRPr lang="en-US"/>
           </a:p>
@@ -2857,7 +2925,7 @@
           <a:p>
             <a:fld id="{3C1A2404-A312-4657-8292-B0E4B798C0E7}" type="datetime1">
               <a:rPr lang="en-US" smtClean="0"/>
-              <a:t>3/13/2026</a:t>
+              <a:t>6/15/2026</a:t>
             </a:fld>
             <a:endParaRPr lang="en-US"/>
           </a:p>
@@ -3138,7 +3206,7 @@
           <a:p>
             <a:fld id="{A9944A73-44BC-44C3-B99F-A0232951B267}" type="datetime1">
               <a:rPr lang="en-US" smtClean="0"/>
-              <a:t>3/13/2026</a:t>
+              <a:t>6/15/2026</a:t>
             </a:fld>
             <a:endParaRPr lang="en-US"/>
           </a:p>
@@ -3553,7 +3621,7 @@
           <a:p>
             <a:fld id="{FED12FDD-77D0-4A09-A7BF-76E5C63CBF2F}" type="datetime1">
               <a:rPr lang="en-US" smtClean="0"/>
-              <a:t>3/13/2026</a:t>
+              <a:t>6/15/2026</a:t>
             </a:fld>
             <a:endParaRPr lang="en-US"/>
           </a:p>
@@ -3666,7 +3734,7 @@
           <a:p>
             <a:fld id="{1BE876FE-512A-4774-A2B9-2BDC34E4BD18}" type="datetime1">
               <a:rPr lang="en-US" smtClean="0"/>
-              <a:t>3/13/2026</a:t>
+              <a:t>6/15/2026</a:t>
             </a:fld>
             <a:endParaRPr lang="en-US"/>
           </a:p>
@@ -4976,7 +5044,7 @@
           <a:p>
             <a:fld id="{8BF02AB2-EABE-44C0-9D58-D80514717591}" type="datetime1">
               <a:rPr lang="en-US" smtClean="0"/>
-              <a:t>3/13/2026</a:t>
+              <a:t>6/15/2026</a:t>
             </a:fld>
             <a:endParaRPr lang="en-US"/>
           </a:p>
@@ -7829,7 +7897,7 @@
           <p:cNvPr id="2" name="Slide Number Placeholder 1">
             <a:extLst>
               <a:ext uri="{FF2B5EF4-FFF2-40B4-BE49-F238E27FC236}">
-                <a16:creationId xmlns:a16="http://schemas.microsoft.com/office/drawing/2014/main" id="{FF3B77EB-5A54-0C07-2406-B303EA637F14}"/>
+                <a16:creationId xmlns:a16="http://schemas.microsoft.com/office/drawing/2014/main" id="{ACD8E7D9-6C25-6C06-6A41-89892B2B2D7C}"/>
               </a:ext>
             </a:extLst>
           </p:cNvPr>
@@ -7859,7 +7927,7 @@
           <p:cNvPr id="3" name="Text Placeholder 2">
             <a:extLst>
               <a:ext uri="{FF2B5EF4-FFF2-40B4-BE49-F238E27FC236}">
-                <a16:creationId xmlns:a16="http://schemas.microsoft.com/office/drawing/2014/main" id="{FAEE4E71-5876-A2C4-FD26-CE548216836A}"/>
+                <a16:creationId xmlns:a16="http://schemas.microsoft.com/office/drawing/2014/main" id="{26FBF710-CF7F-7F50-8D0A-4854AADBCDF6}"/>
               </a:ext>
             </a:extLst>
           </p:cNvPr>
@@ -7877,7 +7945,7 @@
           <a:p>
             <a:r>
               <a:rPr lang="en-AU" dirty="0"/>
-              <a:t>Questionnaire</a:t>
+              <a:t>Making Blossom’s Skin</a:t>
             </a:r>
           </a:p>
         </p:txBody>
@@ -7887,7 +7955,7 @@
           <p:cNvPr id="4" name="Text Placeholder 3">
             <a:extLst>
               <a:ext uri="{FF2B5EF4-FFF2-40B4-BE49-F238E27FC236}">
-                <a16:creationId xmlns:a16="http://schemas.microsoft.com/office/drawing/2014/main" id="{E13AA2F1-3E8E-F220-694A-21D127C46EFF}"/>
+                <a16:creationId xmlns:a16="http://schemas.microsoft.com/office/drawing/2014/main" id="{62ABC290-95D3-3450-B7D9-FE60FF4BF806}"/>
               </a:ext>
             </a:extLst>
           </p:cNvPr>
@@ -7903,14 +7971,40 @@
           <a:bodyPr/>
           <a:lstStyle/>
           <a:p>
-            <a:endParaRPr lang="en-AU"/>
+            <a:r>
+              <a:rPr lang="en-AU" dirty="0"/>
+              <a:t>Using your research from Lesson 5 and provided templates, design a skin for Blossom</a:t>
+            </a:r>
+          </a:p>
+          <a:p>
+            <a:r>
+              <a:rPr lang="en-AU" dirty="0"/>
+              <a:t>You can stick it together by sewing it, using staples or gluing it together</a:t>
+            </a:r>
+          </a:p>
+          <a:p>
+            <a:endParaRPr lang="en-AU" dirty="0"/>
+          </a:p>
+          <a:p>
+            <a:r>
+              <a:rPr lang="en-AU" dirty="0"/>
+              <a:t>Do you perceive your Blossom how </a:t>
+            </a:r>
+            <a:r>
+              <a:rPr lang="en-AU"/>
+              <a:t>you wanted to?</a:t>
+            </a:r>
+            <a:endParaRPr lang="en-AU" dirty="0"/>
+          </a:p>
+          <a:p>
+            <a:endParaRPr lang="en-AU" dirty="0"/>
           </a:p>
         </p:txBody>
       </p:sp>
     </p:spTree>
     <p:extLst>
       <p:ext uri="{BB962C8B-B14F-4D97-AF65-F5344CB8AC3E}">
-        <p14:creationId xmlns:p14="http://schemas.microsoft.com/office/powerpoint/2010/main" val="923499938"/>
+        <p14:creationId xmlns:p14="http://schemas.microsoft.com/office/powerpoint/2010/main" val="1527236185"/>
       </p:ext>
     </p:extLst>
   </p:cSld>
@@ -7925,7 +8019,13 @@
   <p:cSld>
     <p:spTree>
       <p:nvGrpSpPr>
-        <p:cNvPr id="1" name=""/>
+        <p:cNvPr id="1" name="">
+          <a:extLst>
+            <a:ext uri="{FF2B5EF4-FFF2-40B4-BE49-F238E27FC236}">
+              <a16:creationId xmlns:a16="http://schemas.microsoft.com/office/drawing/2014/main" id="{2BEC23A2-803E-3E0D-8E53-8319F0F5D3C1}"/>
+            </a:ext>
+          </a:extLst>
+        </p:cNvPr>
         <p:cNvGrpSpPr/>
         <p:nvPr/>
       </p:nvGrpSpPr>
@@ -7942,7 +8042,7 @@
           <p:cNvPr id="2" name="Slide Number Placeholder 1">
             <a:extLst>
               <a:ext uri="{FF2B5EF4-FFF2-40B4-BE49-F238E27FC236}">
-                <a16:creationId xmlns:a16="http://schemas.microsoft.com/office/drawing/2014/main" id="{1712624C-3B90-6DF7-C9F7-C9DA6EF7E789}"/>
+                <a16:creationId xmlns:a16="http://schemas.microsoft.com/office/drawing/2014/main" id="{846D5B99-7D88-AC8E-FF91-2370F74424E9}"/>
               </a:ext>
             </a:extLst>
           </p:cNvPr>
@@ -7959,11 +8059,11 @@
           <a:lstStyle/>
           <a:p>
             <a:fld id="{B6F15528-21DE-4FAA-801E-634DDDAF4B2B}" type="slidenum">
-              <a:rPr lang="en-US" smtClean="0"/>
+              <a:rPr lang="en-AU" noProof="0" smtClean="0"/>
               <a:pPr/>
               <a:t>23</a:t>
             </a:fld>
-            <a:endParaRPr lang="en-US"/>
+            <a:endParaRPr lang="en-AU" noProof="0"/>
           </a:p>
         </p:txBody>
       </p:sp>
@@ -7972,7 +8072,7 @@
           <p:cNvPr id="3" name="Text Placeholder 2">
             <a:extLst>
               <a:ext uri="{FF2B5EF4-FFF2-40B4-BE49-F238E27FC236}">
-                <a16:creationId xmlns:a16="http://schemas.microsoft.com/office/drawing/2014/main" id="{27146CC3-B1F8-C528-64DD-61FB65995EA7}"/>
+                <a16:creationId xmlns:a16="http://schemas.microsoft.com/office/drawing/2014/main" id="{7F17FFD6-5C4E-060E-ECDA-3AD437EE4DE0}"/>
               </a:ext>
             </a:extLst>
           </p:cNvPr>
@@ -7989,75 +8089,46 @@
           <a:lstStyle/>
           <a:p>
             <a:r>
-              <a:rPr lang="en-AU" dirty="0"/>
-              <a:t>Summary</a:t>
-            </a:r>
-          </a:p>
-        </p:txBody>
-      </p:sp>
-      <p:sp>
-        <p:nvSpPr>
-          <p:cNvPr id="4" name="Text Placeholder 3">
+              <a:rPr lang="en-AU" noProof="0"/>
+              <a:t>Survey</a:t>
+            </a:r>
+          </a:p>
+        </p:txBody>
+      </p:sp>
+      <p:pic>
+        <p:nvPicPr>
+          <p:cNvPr id="6" name="Picture 5">
             <a:extLst>
               <a:ext uri="{FF2B5EF4-FFF2-40B4-BE49-F238E27FC236}">
-                <a16:creationId xmlns:a16="http://schemas.microsoft.com/office/drawing/2014/main" id="{19C599E6-865C-4BB5-8012-07B6A3138912}"/>
+                <a16:creationId xmlns:a16="http://schemas.microsoft.com/office/drawing/2014/main" id="{CB942723-228E-116C-ECAB-6EB59666C047}"/>
               </a:ext>
             </a:extLst>
           </p:cNvPr>
-          <p:cNvSpPr>
-            <a:spLocks noGrp="1"/>
-          </p:cNvSpPr>
-          <p:nvPr>
-            <p:ph type="body" sz="quarter" idx="14"/>
-          </p:nvPr>
-        </p:nvSpPr>
-        <p:spPr/>
-        <p:txBody>
-          <a:bodyPr/>
-          <a:lstStyle/>
-          <a:p>
-            <a:r>
-              <a:rPr lang="en-AU" dirty="0"/>
-              <a:t>Sample script: </a:t>
-            </a:r>
-            <a:r>
-              <a:rPr lang="en-AU" b="0" i="1" dirty="0"/>
-              <a:t>“Ethics is how we decide what is right and wrong when the answer isn't obvious — it requires judgment, values, and empathy</a:t>
-            </a:r>
-          </a:p>
-          <a:p>
-            <a:r>
-              <a:rPr lang="en-AU" b="0" i="1" dirty="0"/>
-              <a:t>AI cannot make ethical decisions on its own because it has no feelings, no judgment, and no understanding of consequences</a:t>
-            </a:r>
-          </a:p>
-          <a:p>
-            <a:r>
-              <a:rPr lang="en-AU" b="0" i="1" dirty="0"/>
-              <a:t>Bias in AI comes from the data it was trained on — if that data is unrepresentative, the AI will reproduce that unfairness at scale</a:t>
-            </a:r>
-          </a:p>
-          <a:p>
-            <a:r>
-              <a:rPr lang="en-AU" b="0" i="1" dirty="0"/>
-              <a:t>The AI is not being deliberately unfair — it simply reflects the limitations and gaps in what it was taught</a:t>
-            </a:r>
-          </a:p>
-          <a:p>
-            <a:r>
-              <a:rPr lang="en-AU" b="0" i="1" dirty="0"/>
-              <a:t>Humans must remain responsible for the ethical consequences of AI decisions — including the people who build it, use it, and deploy it”</a:t>
-            </a:r>
-          </a:p>
-          <a:p>
-            <a:endParaRPr lang="en-AU" dirty="0"/>
-          </a:p>
-        </p:txBody>
-      </p:sp>
+          <p:cNvPicPr>
+            <a:picLocks noChangeAspect="1"/>
+          </p:cNvPicPr>
+          <p:nvPr/>
+        </p:nvPicPr>
+        <p:blipFill>
+          <a:blip r:embed="rId2"/>
+          <a:stretch>
+            <a:fillRect/>
+          </a:stretch>
+        </p:blipFill>
+        <p:spPr>
+          <a:xfrm>
+            <a:off x="2290834" y="1659810"/>
+            <a:ext cx="5324331" cy="4648954"/>
+          </a:xfrm>
+          <a:prstGeom prst="rect">
+            <a:avLst/>
+          </a:prstGeom>
+        </p:spPr>
+      </p:pic>
     </p:spTree>
     <p:extLst>
       <p:ext uri="{BB962C8B-B14F-4D97-AF65-F5344CB8AC3E}">
-        <p14:creationId xmlns:p14="http://schemas.microsoft.com/office/powerpoint/2010/main" val="3747085430"/>
+        <p14:creationId xmlns:p14="http://schemas.microsoft.com/office/powerpoint/2010/main" val="3211396220"/>
       </p:ext>
     </p:extLst>
   </p:cSld>
@@ -8089,7 +8160,7 @@
           <p:cNvPr id="2" name="Slide Number Placeholder 1">
             <a:extLst>
               <a:ext uri="{FF2B5EF4-FFF2-40B4-BE49-F238E27FC236}">
-                <a16:creationId xmlns:a16="http://schemas.microsoft.com/office/drawing/2014/main" id="{159CE9FC-1BAC-3AC6-42B3-0FDE54699F51}"/>
+                <a16:creationId xmlns:a16="http://schemas.microsoft.com/office/drawing/2014/main" id="{1712624C-3B90-6DF7-C9F7-C9DA6EF7E789}"/>
               </a:ext>
             </a:extLst>
           </p:cNvPr>
@@ -8109,6 +8180,153 @@
               <a:rPr lang="en-US" smtClean="0"/>
               <a:pPr/>
               <a:t>24</a:t>
+            </a:fld>
+            <a:endParaRPr lang="en-US"/>
+          </a:p>
+        </p:txBody>
+      </p:sp>
+      <p:sp>
+        <p:nvSpPr>
+          <p:cNvPr id="3" name="Text Placeholder 2">
+            <a:extLst>
+              <a:ext uri="{FF2B5EF4-FFF2-40B4-BE49-F238E27FC236}">
+                <a16:creationId xmlns:a16="http://schemas.microsoft.com/office/drawing/2014/main" id="{27146CC3-B1F8-C528-64DD-61FB65995EA7}"/>
+              </a:ext>
+            </a:extLst>
+          </p:cNvPr>
+          <p:cNvSpPr>
+            <a:spLocks noGrp="1"/>
+          </p:cNvSpPr>
+          <p:nvPr>
+            <p:ph type="body" sz="quarter" idx="13"/>
+          </p:nvPr>
+        </p:nvSpPr>
+        <p:spPr/>
+        <p:txBody>
+          <a:bodyPr/>
+          <a:lstStyle/>
+          <a:p>
+            <a:r>
+              <a:rPr lang="en-AU" dirty="0"/>
+              <a:t>Summary</a:t>
+            </a:r>
+          </a:p>
+        </p:txBody>
+      </p:sp>
+      <p:sp>
+        <p:nvSpPr>
+          <p:cNvPr id="4" name="Text Placeholder 3">
+            <a:extLst>
+              <a:ext uri="{FF2B5EF4-FFF2-40B4-BE49-F238E27FC236}">
+                <a16:creationId xmlns:a16="http://schemas.microsoft.com/office/drawing/2014/main" id="{19C599E6-865C-4BB5-8012-07B6A3138912}"/>
+              </a:ext>
+            </a:extLst>
+          </p:cNvPr>
+          <p:cNvSpPr>
+            <a:spLocks noGrp="1"/>
+          </p:cNvSpPr>
+          <p:nvPr>
+            <p:ph type="body" sz="quarter" idx="14"/>
+          </p:nvPr>
+        </p:nvSpPr>
+        <p:spPr/>
+        <p:txBody>
+          <a:bodyPr/>
+          <a:lstStyle/>
+          <a:p>
+            <a:r>
+              <a:rPr lang="en-AU" dirty="0"/>
+              <a:t>Sample script: </a:t>
+            </a:r>
+            <a:r>
+              <a:rPr lang="en-AU" b="0" i="1" dirty="0"/>
+              <a:t>“Ethics is how we decide what is right and wrong when the answer isn't obvious — it requires judgment, values, and empathy</a:t>
+            </a:r>
+          </a:p>
+          <a:p>
+            <a:r>
+              <a:rPr lang="en-AU" b="0" i="1" dirty="0"/>
+              <a:t>AI cannot make ethical decisions on its own because it has no feelings, no judgment, and no understanding of consequences</a:t>
+            </a:r>
+          </a:p>
+          <a:p>
+            <a:r>
+              <a:rPr lang="en-AU" b="0" i="1" dirty="0"/>
+              <a:t>Bias in AI comes from the data it was trained on — if that data is unrepresentative, the AI will reproduce that unfairness at scale</a:t>
+            </a:r>
+          </a:p>
+          <a:p>
+            <a:r>
+              <a:rPr lang="en-AU" b="0" i="1" dirty="0"/>
+              <a:t>The AI is not being deliberately unfair — it simply reflects the limitations and gaps in what it was taught</a:t>
+            </a:r>
+          </a:p>
+          <a:p>
+            <a:r>
+              <a:rPr lang="en-AU" b="0" i="1" dirty="0"/>
+              <a:t>Humans must remain responsible for the ethical consequences of AI decisions — including the people who build it, use it, and deploy it”</a:t>
+            </a:r>
+          </a:p>
+          <a:p>
+            <a:endParaRPr lang="en-AU" dirty="0"/>
+          </a:p>
+        </p:txBody>
+      </p:sp>
+    </p:spTree>
+    <p:extLst>
+      <p:ext uri="{BB962C8B-B14F-4D97-AF65-F5344CB8AC3E}">
+        <p14:creationId xmlns:p14="http://schemas.microsoft.com/office/powerpoint/2010/main" val="3747085430"/>
+      </p:ext>
+    </p:extLst>
+  </p:cSld>
+  <p:clrMapOvr>
+    <a:masterClrMapping/>
+  </p:clrMapOvr>
+</p:sld>
+</file>
+
+<file path=ppt/slides/slide25.xml><?xml version="1.0" encoding="utf-8"?>
+<p:sld xmlns:a="http://schemas.openxmlformats.org/drawingml/2006/main" xmlns:r="http://schemas.openxmlformats.org/officeDocument/2006/relationships" xmlns:p="http://schemas.openxmlformats.org/presentationml/2006/main">
+  <p:cSld>
+    <p:spTree>
+      <p:nvGrpSpPr>
+        <p:cNvPr id="1" name=""/>
+        <p:cNvGrpSpPr/>
+        <p:nvPr/>
+      </p:nvGrpSpPr>
+      <p:grpSpPr>
+        <a:xfrm>
+          <a:off x="0" y="0"/>
+          <a:ext cx="0" cy="0"/>
+          <a:chOff x="0" y="0"/>
+          <a:chExt cx="0" cy="0"/>
+        </a:xfrm>
+      </p:grpSpPr>
+      <p:sp>
+        <p:nvSpPr>
+          <p:cNvPr id="2" name="Slide Number Placeholder 1">
+            <a:extLst>
+              <a:ext uri="{FF2B5EF4-FFF2-40B4-BE49-F238E27FC236}">
+                <a16:creationId xmlns:a16="http://schemas.microsoft.com/office/drawing/2014/main" id="{159CE9FC-1BAC-3AC6-42B3-0FDE54699F51}"/>
+              </a:ext>
+            </a:extLst>
+          </p:cNvPr>
+          <p:cNvSpPr>
+            <a:spLocks noGrp="1"/>
+          </p:cNvSpPr>
+          <p:nvPr>
+            <p:ph type="sldNum" sz="quarter" idx="12"/>
+          </p:nvPr>
+        </p:nvSpPr>
+        <p:spPr/>
+        <p:txBody>
+          <a:bodyPr/>
+          <a:lstStyle/>
+          <a:p>
+            <a:fld id="{B6F15528-21DE-4FAA-801E-634DDDAF4B2B}" type="slidenum">
+              <a:rPr lang="en-US" smtClean="0"/>
+              <a:pPr/>
+              <a:t>25</a:t>
             </a:fld>
             <a:endParaRPr lang="en-US"/>
           </a:p>
@@ -8591,27 +8809,15 @@
               <a:buNone/>
             </a:pPr>
             <a:r>
-              <a:rPr lang="en-AU" dirty="0">
-                <a:highlight>
-                  <a:srgbClr val="FFFF00"/>
-                </a:highlight>
-              </a:rPr>
+              <a:rPr lang="en-AU" dirty="0"/>
               <a:t>4. </a:t>
             </a:r>
             <a:r>
-              <a:rPr lang="en-AU" b="1" dirty="0">
-                <a:highlight>
-                  <a:srgbClr val="FFFF00"/>
-                </a:highlight>
-              </a:rPr>
+              <a:rPr lang="en-AU" b="1" dirty="0"/>
               <a:t>Making Blossom’s skin </a:t>
             </a:r>
             <a:r>
-              <a:rPr lang="en-AU" dirty="0">
-                <a:highlight>
-                  <a:srgbClr val="FFFF00"/>
-                </a:highlight>
-              </a:rPr>
+              <a:rPr lang="en-AU" dirty="0"/>
               <a:t>- 40 min</a:t>
             </a:r>
           </a:p>
